--- a/project beheer/Documenten/50%_presentatie.pptx
+++ b/project beheer/Documenten/50%_presentatie.pptx
@@ -5,7 +5,7 @@
     <p:sldMasterId id="2147483720" r:id="rId1"/>
   </p:sldMasterIdLst>
   <p:notesMasterIdLst>
-    <p:notesMasterId r:id="rId12"/>
+    <p:notesMasterId r:id="rId14"/>
   </p:notesMasterIdLst>
   <p:sldIdLst>
     <p:sldId id="258" r:id="rId2"/>
@@ -14,10 +14,12 @@
     <p:sldId id="261" r:id="rId5"/>
     <p:sldId id="269" r:id="rId6"/>
     <p:sldId id="270" r:id="rId7"/>
-    <p:sldId id="268" r:id="rId8"/>
-    <p:sldId id="262" r:id="rId9"/>
-    <p:sldId id="271" r:id="rId10"/>
-    <p:sldId id="272" r:id="rId11"/>
+    <p:sldId id="273" r:id="rId8"/>
+    <p:sldId id="274" r:id="rId9"/>
+    <p:sldId id="268" r:id="rId10"/>
+    <p:sldId id="262" r:id="rId11"/>
+    <p:sldId id="271" r:id="rId12"/>
+    <p:sldId id="272" r:id="rId13"/>
   </p:sldIdLst>
   <p:sldSz cx="12192000" cy="6858000"/>
   <p:notesSz cx="6858000" cy="9144000"/>
@@ -9358,6 +9360,269 @@
       </p:grpSpPr>
       <p:sp>
         <p:nvSpPr>
+          <p:cNvPr id="2" name="Titel 1">
+            <a:extLst>
+              <a:ext uri="{FF2B5EF4-FFF2-40B4-BE49-F238E27FC236}">
+                <a16:creationId xmlns:a16="http://schemas.microsoft.com/office/drawing/2014/main" id="{6FB21E75-C55C-972B-A3E6-7E848357A606}"/>
+              </a:ext>
+            </a:extLst>
+          </p:cNvPr>
+          <p:cNvSpPr>
+            <a:spLocks noGrp="1"/>
+          </p:cNvSpPr>
+          <p:nvPr>
+            <p:ph type="title"/>
+          </p:nvPr>
+        </p:nvSpPr>
+        <p:spPr>
+          <a:xfrm>
+            <a:off x="2276498" y="396242"/>
+            <a:ext cx="7950984" cy="1081705"/>
+          </a:xfrm>
+        </p:spPr>
+        <p:txBody>
+          <a:bodyPr/>
+          <a:lstStyle/>
+          <a:p>
+            <a:r>
+              <a:rPr lang="nl-NL" dirty="0"/>
+              <a:t>Demo</a:t>
+            </a:r>
+            <a:endParaRPr lang="nl-NL" dirty="0">
+              <a:cs typeface="Arial"/>
+            </a:endParaRPr>
+          </a:p>
+        </p:txBody>
+      </p:sp>
+      <p:sp>
+        <p:nvSpPr>
+          <p:cNvPr id="3" name="Tijdelijke aanduiding voor inhoud 2">
+            <a:extLst>
+              <a:ext uri="{FF2B5EF4-FFF2-40B4-BE49-F238E27FC236}">
+                <a16:creationId xmlns:a16="http://schemas.microsoft.com/office/drawing/2014/main" id="{6A0BB37B-BBBD-DA1E-F54F-3F8ABF217F4B}"/>
+              </a:ext>
+            </a:extLst>
+          </p:cNvPr>
+          <p:cNvSpPr>
+            <a:spLocks noGrp="1"/>
+          </p:cNvSpPr>
+          <p:nvPr>
+            <p:ph sz="half" idx="1"/>
+          </p:nvPr>
+        </p:nvSpPr>
+        <p:spPr>
+          <a:xfrm>
+            <a:off x="1269193" y="1477947"/>
+            <a:ext cx="4468944" cy="3689555"/>
+          </a:xfrm>
+        </p:spPr>
+        <p:txBody>
+          <a:bodyPr vert="horz" lIns="91440" tIns="45720" rIns="91440" bIns="45720" rtlCol="0" anchor="t">
+            <a:normAutofit/>
+          </a:bodyPr>
+          <a:lstStyle/>
+          <a:p>
+            <a:pPr marL="344170" indent="-344170"/>
+            <a:endParaRPr lang="nl-NL">
+              <a:cs typeface="Arial" panose="020B0604020202020204"/>
+            </a:endParaRPr>
+          </a:p>
+        </p:txBody>
+      </p:sp>
+      <p:sp>
+        <p:nvSpPr>
+          <p:cNvPr id="4" name="Tijdelijke aanduiding voor inhoud 3">
+            <a:extLst>
+              <a:ext uri="{FF2B5EF4-FFF2-40B4-BE49-F238E27FC236}">
+                <a16:creationId xmlns:a16="http://schemas.microsoft.com/office/drawing/2014/main" id="{732A74DD-FB8F-9961-78E0-93E4212D2EFA}"/>
+              </a:ext>
+            </a:extLst>
+          </p:cNvPr>
+          <p:cNvSpPr>
+            <a:spLocks noGrp="1"/>
+          </p:cNvSpPr>
+          <p:nvPr>
+            <p:ph sz="half" idx="2"/>
+          </p:nvPr>
+        </p:nvSpPr>
+        <p:spPr>
+          <a:xfrm>
+            <a:off x="7028585" y="1241633"/>
+            <a:ext cx="3894222" cy="3689555"/>
+          </a:xfrm>
+        </p:spPr>
+        <p:txBody>
+          <a:bodyPr vert="horz" lIns="91440" tIns="45720" rIns="91440" bIns="45720" rtlCol="0" anchor="t">
+            <a:normAutofit/>
+          </a:bodyPr>
+          <a:lstStyle/>
+          <a:p>
+            <a:pPr marL="344170" indent="-344170"/>
+            <a:endParaRPr lang="nl-NL">
+              <a:cs typeface="Arial" panose="020B0604020202020204"/>
+            </a:endParaRPr>
+          </a:p>
+          <a:p>
+            <a:pPr marL="344170" indent="-344170"/>
+            <a:endParaRPr lang="nl-NL">
+              <a:cs typeface="Arial" panose="020B0604020202020204"/>
+            </a:endParaRPr>
+          </a:p>
+        </p:txBody>
+      </p:sp>
+    </p:spTree>
+    <p:extLst>
+      <p:ext uri="{BB962C8B-B14F-4D97-AF65-F5344CB8AC3E}">
+        <p14:creationId xmlns:p14="http://schemas.microsoft.com/office/powerpoint/2010/main" val="933717352"/>
+      </p:ext>
+    </p:extLst>
+  </p:cSld>
+  <p:clrMapOvr>
+    <a:masterClrMapping/>
+  </p:clrMapOvr>
+</p:sld>
+</file>
+
+<file path=ppt/slides/slide11.xml><?xml version="1.0" encoding="utf-8"?>
+<p:sld xmlns:a="http://schemas.openxmlformats.org/drawingml/2006/main" xmlns:r="http://schemas.openxmlformats.org/officeDocument/2006/relationships" xmlns:p="http://schemas.openxmlformats.org/presentationml/2006/main">
+  <p:cSld>
+    <p:spTree>
+      <p:nvGrpSpPr>
+        <p:cNvPr id="1" name=""/>
+        <p:cNvGrpSpPr/>
+        <p:nvPr/>
+      </p:nvGrpSpPr>
+      <p:grpSpPr>
+        <a:xfrm>
+          <a:off x="0" y="0"/>
+          <a:ext cx="0" cy="0"/>
+          <a:chOff x="0" y="0"/>
+          <a:chExt cx="0" cy="0"/>
+        </a:xfrm>
+      </p:grpSpPr>
+      <p:sp>
+        <p:nvSpPr>
+          <p:cNvPr id="2" name="Title 1">
+            <a:extLst>
+              <a:ext uri="{FF2B5EF4-FFF2-40B4-BE49-F238E27FC236}">
+                <a16:creationId xmlns:a16="http://schemas.microsoft.com/office/drawing/2014/main" id="{66312637-F169-CE81-3471-5812E52080D1}"/>
+              </a:ext>
+            </a:extLst>
+          </p:cNvPr>
+          <p:cNvSpPr>
+            <a:spLocks noGrp="1"/>
+          </p:cNvSpPr>
+          <p:nvPr>
+            <p:ph type="title"/>
+          </p:nvPr>
+        </p:nvSpPr>
+        <p:spPr/>
+        <p:txBody>
+          <a:bodyPr/>
+          <a:lstStyle/>
+          <a:p>
+            <a:r>
+              <a:rPr lang="en-GB" dirty="0" err="1"/>
+              <a:t>Vervolg</a:t>
+            </a:r>
+            <a:r>
+              <a:rPr lang="en-GB" dirty="0"/>
+              <a:t> </a:t>
+            </a:r>
+            <a:r>
+              <a:rPr lang="en-GB" dirty="0" err="1"/>
+              <a:t>volgende</a:t>
+            </a:r>
+            <a:r>
+              <a:rPr lang="en-GB" dirty="0"/>
+              <a:t> 50%</a:t>
+            </a:r>
+            <a:endParaRPr lang="LID4096" dirty="0"/>
+          </a:p>
+        </p:txBody>
+      </p:sp>
+      <p:sp>
+        <p:nvSpPr>
+          <p:cNvPr id="3" name="Content Placeholder 2">
+            <a:extLst>
+              <a:ext uri="{FF2B5EF4-FFF2-40B4-BE49-F238E27FC236}">
+                <a16:creationId xmlns:a16="http://schemas.microsoft.com/office/drawing/2014/main" id="{14A9FD5D-7191-D502-6B86-803CEDE67CDE}"/>
+              </a:ext>
+            </a:extLst>
+          </p:cNvPr>
+          <p:cNvSpPr>
+            <a:spLocks noGrp="1"/>
+          </p:cNvSpPr>
+          <p:nvPr>
+            <p:ph sz="half" idx="1"/>
+          </p:nvPr>
+        </p:nvSpPr>
+        <p:spPr/>
+        <p:txBody>
+          <a:bodyPr/>
+          <a:lstStyle/>
+          <a:p>
+            <a:endParaRPr lang="LID4096"/>
+          </a:p>
+        </p:txBody>
+      </p:sp>
+      <p:sp>
+        <p:nvSpPr>
+          <p:cNvPr id="4" name="Content Placeholder 3">
+            <a:extLst>
+              <a:ext uri="{FF2B5EF4-FFF2-40B4-BE49-F238E27FC236}">
+                <a16:creationId xmlns:a16="http://schemas.microsoft.com/office/drawing/2014/main" id="{496D809B-8CE1-CE92-3098-393082CC9AB1}"/>
+              </a:ext>
+            </a:extLst>
+          </p:cNvPr>
+          <p:cNvSpPr>
+            <a:spLocks noGrp="1"/>
+          </p:cNvSpPr>
+          <p:nvPr>
+            <p:ph sz="half" idx="2"/>
+          </p:nvPr>
+        </p:nvSpPr>
+        <p:spPr/>
+        <p:txBody>
+          <a:bodyPr/>
+          <a:lstStyle/>
+          <a:p>
+            <a:endParaRPr lang="LID4096"/>
+          </a:p>
+        </p:txBody>
+      </p:sp>
+    </p:spTree>
+    <p:extLst>
+      <p:ext uri="{BB962C8B-B14F-4D97-AF65-F5344CB8AC3E}">
+        <p14:creationId xmlns:p14="http://schemas.microsoft.com/office/powerpoint/2010/main" val="2960483433"/>
+      </p:ext>
+    </p:extLst>
+  </p:cSld>
+  <p:clrMapOvr>
+    <a:masterClrMapping/>
+  </p:clrMapOvr>
+</p:sld>
+</file>
+
+<file path=ppt/slides/slide12.xml><?xml version="1.0" encoding="utf-8"?>
+<p:sld xmlns:a="http://schemas.openxmlformats.org/drawingml/2006/main" xmlns:r="http://schemas.openxmlformats.org/officeDocument/2006/relationships" xmlns:p="http://schemas.openxmlformats.org/presentationml/2006/main">
+  <p:cSld>
+    <p:spTree>
+      <p:nvGrpSpPr>
+        <p:cNvPr id="1" name=""/>
+        <p:cNvGrpSpPr/>
+        <p:nvPr/>
+      </p:nvGrpSpPr>
+      <p:grpSpPr>
+        <a:xfrm>
+          <a:off x="0" y="0"/>
+          <a:ext cx="0" cy="0"/>
+          <a:chOff x="0" y="0"/>
+          <a:chExt cx="0" cy="0"/>
+        </a:xfrm>
+      </p:grpSpPr>
+      <p:sp>
+        <p:nvSpPr>
           <p:cNvPr id="2" name="Title 1">
             <a:extLst>
               <a:ext uri="{FF2B5EF4-FFF2-40B4-BE49-F238E27FC236}">
@@ -10009,6 +10274,221 @@
 <file path=ppt/slides/slide7.xml><?xml version="1.0" encoding="utf-8"?>
 <p:sld xmlns:a="http://schemas.openxmlformats.org/drawingml/2006/main" xmlns:r="http://schemas.openxmlformats.org/officeDocument/2006/relationships" xmlns:p="http://schemas.openxmlformats.org/presentationml/2006/main">
   <p:cSld>
+    <p:spTree>
+      <p:nvGrpSpPr>
+        <p:cNvPr id="1" name=""/>
+        <p:cNvGrpSpPr/>
+        <p:nvPr/>
+      </p:nvGrpSpPr>
+      <p:grpSpPr>
+        <a:xfrm>
+          <a:off x="0" y="0"/>
+          <a:ext cx="0" cy="0"/>
+          <a:chOff x="0" y="0"/>
+          <a:chExt cx="0" cy="0"/>
+        </a:xfrm>
+      </p:grpSpPr>
+      <p:sp>
+        <p:nvSpPr>
+          <p:cNvPr id="2" name="Title 1">
+            <a:extLst>
+              <a:ext uri="{FF2B5EF4-FFF2-40B4-BE49-F238E27FC236}">
+                <a16:creationId xmlns:a16="http://schemas.microsoft.com/office/drawing/2014/main" id="{44A2EA87-818C-D165-7F39-28AC8AE57D65}"/>
+              </a:ext>
+            </a:extLst>
+          </p:cNvPr>
+          <p:cNvSpPr>
+            <a:spLocks noGrp="1"/>
+          </p:cNvSpPr>
+          <p:nvPr>
+            <p:ph type="title"/>
+          </p:nvPr>
+        </p:nvSpPr>
+        <p:spPr/>
+        <p:txBody>
+          <a:bodyPr/>
+          <a:lstStyle/>
+          <a:p>
+            <a:endParaRPr lang="LID4096"/>
+          </a:p>
+        </p:txBody>
+      </p:sp>
+      <p:sp>
+        <p:nvSpPr>
+          <p:cNvPr id="3" name="Content Placeholder 2">
+            <a:extLst>
+              <a:ext uri="{FF2B5EF4-FFF2-40B4-BE49-F238E27FC236}">
+                <a16:creationId xmlns:a16="http://schemas.microsoft.com/office/drawing/2014/main" id="{44596831-0189-FEF0-01E1-8C3179D6FAAE}"/>
+              </a:ext>
+            </a:extLst>
+          </p:cNvPr>
+          <p:cNvSpPr>
+            <a:spLocks noGrp="1"/>
+          </p:cNvSpPr>
+          <p:nvPr>
+            <p:ph sz="half" idx="1"/>
+          </p:nvPr>
+        </p:nvSpPr>
+        <p:spPr/>
+        <p:txBody>
+          <a:bodyPr/>
+          <a:lstStyle/>
+          <a:p>
+            <a:endParaRPr lang="LID4096"/>
+          </a:p>
+        </p:txBody>
+      </p:sp>
+      <p:sp>
+        <p:nvSpPr>
+          <p:cNvPr id="4" name="Content Placeholder 3">
+            <a:extLst>
+              <a:ext uri="{FF2B5EF4-FFF2-40B4-BE49-F238E27FC236}">
+                <a16:creationId xmlns:a16="http://schemas.microsoft.com/office/drawing/2014/main" id="{4591C898-3136-DA14-3CBA-EFCF5EECABC8}"/>
+              </a:ext>
+            </a:extLst>
+          </p:cNvPr>
+          <p:cNvSpPr>
+            <a:spLocks noGrp="1"/>
+          </p:cNvSpPr>
+          <p:nvPr>
+            <p:ph sz="half" idx="2"/>
+          </p:nvPr>
+        </p:nvSpPr>
+        <p:spPr/>
+        <p:txBody>
+          <a:bodyPr/>
+          <a:lstStyle/>
+          <a:p>
+            <a:endParaRPr lang="LID4096"/>
+          </a:p>
+        </p:txBody>
+      </p:sp>
+    </p:spTree>
+    <p:extLst>
+      <p:ext uri="{BB962C8B-B14F-4D97-AF65-F5344CB8AC3E}">
+        <p14:creationId xmlns:p14="http://schemas.microsoft.com/office/powerpoint/2010/main" val="3971958885"/>
+      </p:ext>
+    </p:extLst>
+  </p:cSld>
+  <p:clrMapOvr>
+    <a:masterClrMapping/>
+  </p:clrMapOvr>
+</p:sld>
+</file>
+
+<file path=ppt/slides/slide8.xml><?xml version="1.0" encoding="utf-8"?>
+<p:sld xmlns:a="http://schemas.openxmlformats.org/drawingml/2006/main" xmlns:r="http://schemas.openxmlformats.org/officeDocument/2006/relationships" xmlns:p="http://schemas.openxmlformats.org/presentationml/2006/main">
+  <p:cSld>
+    <p:spTree>
+      <p:nvGrpSpPr>
+        <p:cNvPr id="1" name=""/>
+        <p:cNvGrpSpPr/>
+        <p:nvPr/>
+      </p:nvGrpSpPr>
+      <p:grpSpPr>
+        <a:xfrm>
+          <a:off x="0" y="0"/>
+          <a:ext cx="0" cy="0"/>
+          <a:chOff x="0" y="0"/>
+          <a:chExt cx="0" cy="0"/>
+        </a:xfrm>
+      </p:grpSpPr>
+      <p:sp>
+        <p:nvSpPr>
+          <p:cNvPr id="2" name="Title 1">
+            <a:extLst>
+              <a:ext uri="{FF2B5EF4-FFF2-40B4-BE49-F238E27FC236}">
+                <a16:creationId xmlns:a16="http://schemas.microsoft.com/office/drawing/2014/main" id="{BCD5C346-C122-67EC-7E00-51669739C8E0}"/>
+              </a:ext>
+            </a:extLst>
+          </p:cNvPr>
+          <p:cNvSpPr>
+            <a:spLocks noGrp="1"/>
+          </p:cNvSpPr>
+          <p:nvPr>
+            <p:ph type="ctrTitle"/>
+          </p:nvPr>
+        </p:nvSpPr>
+        <p:spPr/>
+        <p:txBody>
+          <a:bodyPr/>
+          <a:lstStyle/>
+          <a:p>
+            <a:endParaRPr lang="LID4096" dirty="0"/>
+          </a:p>
+        </p:txBody>
+      </p:sp>
+      <p:sp>
+        <p:nvSpPr>
+          <p:cNvPr id="3" name="Subtitle 2">
+            <a:extLst>
+              <a:ext uri="{FF2B5EF4-FFF2-40B4-BE49-F238E27FC236}">
+                <a16:creationId xmlns:a16="http://schemas.microsoft.com/office/drawing/2014/main" id="{D954E2E0-B4B7-CF58-C05B-BB022DF41EA7}"/>
+              </a:ext>
+            </a:extLst>
+          </p:cNvPr>
+          <p:cNvSpPr>
+            <a:spLocks noGrp="1"/>
+          </p:cNvSpPr>
+          <p:nvPr>
+            <p:ph type="subTitle" idx="1"/>
+          </p:nvPr>
+        </p:nvSpPr>
+        <p:spPr/>
+        <p:txBody>
+          <a:bodyPr/>
+          <a:lstStyle/>
+          <a:p>
+            <a:endParaRPr lang="LID4096"/>
+          </a:p>
+        </p:txBody>
+      </p:sp>
+      <p:pic>
+        <p:nvPicPr>
+          <p:cNvPr id="5" name="Picture 4">
+            <a:extLst>
+              <a:ext uri="{FF2B5EF4-FFF2-40B4-BE49-F238E27FC236}">
+                <a16:creationId xmlns:a16="http://schemas.microsoft.com/office/drawing/2014/main" id="{CE4099CD-392D-9BAC-0BB1-15438C76E084}"/>
+              </a:ext>
+            </a:extLst>
+          </p:cNvPr>
+          <p:cNvPicPr>
+            <a:picLocks noChangeAspect="1"/>
+          </p:cNvPicPr>
+          <p:nvPr/>
+        </p:nvPicPr>
+        <p:blipFill>
+          <a:blip r:embed="rId2"/>
+          <a:stretch>
+            <a:fillRect/>
+          </a:stretch>
+        </p:blipFill>
+        <p:spPr>
+          <a:xfrm>
+            <a:off x="73152" y="1981525"/>
+            <a:ext cx="12192000" cy="2620629"/>
+          </a:xfrm>
+          <a:prstGeom prst="rect">
+            <a:avLst/>
+          </a:prstGeom>
+        </p:spPr>
+      </p:pic>
+    </p:spTree>
+    <p:extLst>
+      <p:ext uri="{BB962C8B-B14F-4D97-AF65-F5344CB8AC3E}">
+        <p14:creationId xmlns:p14="http://schemas.microsoft.com/office/powerpoint/2010/main" val="3948555269"/>
+      </p:ext>
+    </p:extLst>
+  </p:cSld>
+  <p:clrMapOvr>
+    <a:masterClrMapping/>
+  </p:clrMapOvr>
+</p:sld>
+</file>
+
+<file path=ppt/slides/slide9.xml><?xml version="1.0" encoding="utf-8"?>
+<p:sld xmlns:a="http://schemas.openxmlformats.org/drawingml/2006/main" xmlns:r="http://schemas.openxmlformats.org/officeDocument/2006/relationships" xmlns:p="http://schemas.openxmlformats.org/presentationml/2006/main">
+  <p:cSld>
     <p:bg>
       <p:bgPr>
         <a:solidFill>
@@ -10141,269 +10621,6 @@
     <p:extLst>
       <p:ext uri="{BB962C8B-B14F-4D97-AF65-F5344CB8AC3E}">
         <p14:creationId xmlns:p14="http://schemas.microsoft.com/office/powerpoint/2010/main" val="2123140995"/>
-      </p:ext>
-    </p:extLst>
-  </p:cSld>
-  <p:clrMapOvr>
-    <a:masterClrMapping/>
-  </p:clrMapOvr>
-</p:sld>
-</file>
-
-<file path=ppt/slides/slide8.xml><?xml version="1.0" encoding="utf-8"?>
-<p:sld xmlns:a="http://schemas.openxmlformats.org/drawingml/2006/main" xmlns:r="http://schemas.openxmlformats.org/officeDocument/2006/relationships" xmlns:p="http://schemas.openxmlformats.org/presentationml/2006/main">
-  <p:cSld>
-    <p:spTree>
-      <p:nvGrpSpPr>
-        <p:cNvPr id="1" name=""/>
-        <p:cNvGrpSpPr/>
-        <p:nvPr/>
-      </p:nvGrpSpPr>
-      <p:grpSpPr>
-        <a:xfrm>
-          <a:off x="0" y="0"/>
-          <a:ext cx="0" cy="0"/>
-          <a:chOff x="0" y="0"/>
-          <a:chExt cx="0" cy="0"/>
-        </a:xfrm>
-      </p:grpSpPr>
-      <p:sp>
-        <p:nvSpPr>
-          <p:cNvPr id="2" name="Titel 1">
-            <a:extLst>
-              <a:ext uri="{FF2B5EF4-FFF2-40B4-BE49-F238E27FC236}">
-                <a16:creationId xmlns:a16="http://schemas.microsoft.com/office/drawing/2014/main" id="{6FB21E75-C55C-972B-A3E6-7E848357A606}"/>
-              </a:ext>
-            </a:extLst>
-          </p:cNvPr>
-          <p:cNvSpPr>
-            <a:spLocks noGrp="1"/>
-          </p:cNvSpPr>
-          <p:nvPr>
-            <p:ph type="title"/>
-          </p:nvPr>
-        </p:nvSpPr>
-        <p:spPr>
-          <a:xfrm>
-            <a:off x="2276498" y="396242"/>
-            <a:ext cx="7950984" cy="1081705"/>
-          </a:xfrm>
-        </p:spPr>
-        <p:txBody>
-          <a:bodyPr/>
-          <a:lstStyle/>
-          <a:p>
-            <a:r>
-              <a:rPr lang="nl-NL" dirty="0"/>
-              <a:t>Demo</a:t>
-            </a:r>
-            <a:endParaRPr lang="nl-NL" dirty="0">
-              <a:cs typeface="Arial"/>
-            </a:endParaRPr>
-          </a:p>
-        </p:txBody>
-      </p:sp>
-      <p:sp>
-        <p:nvSpPr>
-          <p:cNvPr id="3" name="Tijdelijke aanduiding voor inhoud 2">
-            <a:extLst>
-              <a:ext uri="{FF2B5EF4-FFF2-40B4-BE49-F238E27FC236}">
-                <a16:creationId xmlns:a16="http://schemas.microsoft.com/office/drawing/2014/main" id="{6A0BB37B-BBBD-DA1E-F54F-3F8ABF217F4B}"/>
-              </a:ext>
-            </a:extLst>
-          </p:cNvPr>
-          <p:cNvSpPr>
-            <a:spLocks noGrp="1"/>
-          </p:cNvSpPr>
-          <p:nvPr>
-            <p:ph sz="half" idx="1"/>
-          </p:nvPr>
-        </p:nvSpPr>
-        <p:spPr>
-          <a:xfrm>
-            <a:off x="1269193" y="1477947"/>
-            <a:ext cx="4468944" cy="3689555"/>
-          </a:xfrm>
-        </p:spPr>
-        <p:txBody>
-          <a:bodyPr vert="horz" lIns="91440" tIns="45720" rIns="91440" bIns="45720" rtlCol="0" anchor="t">
-            <a:normAutofit/>
-          </a:bodyPr>
-          <a:lstStyle/>
-          <a:p>
-            <a:pPr marL="344170" indent="-344170"/>
-            <a:endParaRPr lang="nl-NL">
-              <a:cs typeface="Arial" panose="020B0604020202020204"/>
-            </a:endParaRPr>
-          </a:p>
-        </p:txBody>
-      </p:sp>
-      <p:sp>
-        <p:nvSpPr>
-          <p:cNvPr id="4" name="Tijdelijke aanduiding voor inhoud 3">
-            <a:extLst>
-              <a:ext uri="{FF2B5EF4-FFF2-40B4-BE49-F238E27FC236}">
-                <a16:creationId xmlns:a16="http://schemas.microsoft.com/office/drawing/2014/main" id="{732A74DD-FB8F-9961-78E0-93E4212D2EFA}"/>
-              </a:ext>
-            </a:extLst>
-          </p:cNvPr>
-          <p:cNvSpPr>
-            <a:spLocks noGrp="1"/>
-          </p:cNvSpPr>
-          <p:nvPr>
-            <p:ph sz="half" idx="2"/>
-          </p:nvPr>
-        </p:nvSpPr>
-        <p:spPr>
-          <a:xfrm>
-            <a:off x="7028585" y="1241633"/>
-            <a:ext cx="3894222" cy="3689555"/>
-          </a:xfrm>
-        </p:spPr>
-        <p:txBody>
-          <a:bodyPr vert="horz" lIns="91440" tIns="45720" rIns="91440" bIns="45720" rtlCol="0" anchor="t">
-            <a:normAutofit/>
-          </a:bodyPr>
-          <a:lstStyle/>
-          <a:p>
-            <a:pPr marL="344170" indent="-344170"/>
-            <a:endParaRPr lang="nl-NL">
-              <a:cs typeface="Arial" panose="020B0604020202020204"/>
-            </a:endParaRPr>
-          </a:p>
-          <a:p>
-            <a:pPr marL="344170" indent="-344170"/>
-            <a:endParaRPr lang="nl-NL">
-              <a:cs typeface="Arial" panose="020B0604020202020204"/>
-            </a:endParaRPr>
-          </a:p>
-        </p:txBody>
-      </p:sp>
-    </p:spTree>
-    <p:extLst>
-      <p:ext uri="{BB962C8B-B14F-4D97-AF65-F5344CB8AC3E}">
-        <p14:creationId xmlns:p14="http://schemas.microsoft.com/office/powerpoint/2010/main" val="933717352"/>
-      </p:ext>
-    </p:extLst>
-  </p:cSld>
-  <p:clrMapOvr>
-    <a:masterClrMapping/>
-  </p:clrMapOvr>
-</p:sld>
-</file>
-
-<file path=ppt/slides/slide9.xml><?xml version="1.0" encoding="utf-8"?>
-<p:sld xmlns:a="http://schemas.openxmlformats.org/drawingml/2006/main" xmlns:r="http://schemas.openxmlformats.org/officeDocument/2006/relationships" xmlns:p="http://schemas.openxmlformats.org/presentationml/2006/main">
-  <p:cSld>
-    <p:spTree>
-      <p:nvGrpSpPr>
-        <p:cNvPr id="1" name=""/>
-        <p:cNvGrpSpPr/>
-        <p:nvPr/>
-      </p:nvGrpSpPr>
-      <p:grpSpPr>
-        <a:xfrm>
-          <a:off x="0" y="0"/>
-          <a:ext cx="0" cy="0"/>
-          <a:chOff x="0" y="0"/>
-          <a:chExt cx="0" cy="0"/>
-        </a:xfrm>
-      </p:grpSpPr>
-      <p:sp>
-        <p:nvSpPr>
-          <p:cNvPr id="2" name="Title 1">
-            <a:extLst>
-              <a:ext uri="{FF2B5EF4-FFF2-40B4-BE49-F238E27FC236}">
-                <a16:creationId xmlns:a16="http://schemas.microsoft.com/office/drawing/2014/main" id="{66312637-F169-CE81-3471-5812E52080D1}"/>
-              </a:ext>
-            </a:extLst>
-          </p:cNvPr>
-          <p:cNvSpPr>
-            <a:spLocks noGrp="1"/>
-          </p:cNvSpPr>
-          <p:nvPr>
-            <p:ph type="title"/>
-          </p:nvPr>
-        </p:nvSpPr>
-        <p:spPr/>
-        <p:txBody>
-          <a:bodyPr/>
-          <a:lstStyle/>
-          <a:p>
-            <a:r>
-              <a:rPr lang="en-GB" dirty="0" err="1"/>
-              <a:t>Vervolg</a:t>
-            </a:r>
-            <a:r>
-              <a:rPr lang="en-GB" dirty="0"/>
-              <a:t> </a:t>
-            </a:r>
-            <a:r>
-              <a:rPr lang="en-GB" dirty="0" err="1"/>
-              <a:t>volgende</a:t>
-            </a:r>
-            <a:r>
-              <a:rPr lang="en-GB" dirty="0"/>
-              <a:t> 50%</a:t>
-            </a:r>
-            <a:endParaRPr lang="LID4096" dirty="0"/>
-          </a:p>
-        </p:txBody>
-      </p:sp>
-      <p:sp>
-        <p:nvSpPr>
-          <p:cNvPr id="3" name="Content Placeholder 2">
-            <a:extLst>
-              <a:ext uri="{FF2B5EF4-FFF2-40B4-BE49-F238E27FC236}">
-                <a16:creationId xmlns:a16="http://schemas.microsoft.com/office/drawing/2014/main" id="{14A9FD5D-7191-D502-6B86-803CEDE67CDE}"/>
-              </a:ext>
-            </a:extLst>
-          </p:cNvPr>
-          <p:cNvSpPr>
-            <a:spLocks noGrp="1"/>
-          </p:cNvSpPr>
-          <p:nvPr>
-            <p:ph sz="half" idx="1"/>
-          </p:nvPr>
-        </p:nvSpPr>
-        <p:spPr/>
-        <p:txBody>
-          <a:bodyPr/>
-          <a:lstStyle/>
-          <a:p>
-            <a:endParaRPr lang="LID4096"/>
-          </a:p>
-        </p:txBody>
-      </p:sp>
-      <p:sp>
-        <p:nvSpPr>
-          <p:cNvPr id="4" name="Content Placeholder 3">
-            <a:extLst>
-              <a:ext uri="{FF2B5EF4-FFF2-40B4-BE49-F238E27FC236}">
-                <a16:creationId xmlns:a16="http://schemas.microsoft.com/office/drawing/2014/main" id="{496D809B-8CE1-CE92-3098-393082CC9AB1}"/>
-              </a:ext>
-            </a:extLst>
-          </p:cNvPr>
-          <p:cNvSpPr>
-            <a:spLocks noGrp="1"/>
-          </p:cNvSpPr>
-          <p:nvPr>
-            <p:ph sz="half" idx="2"/>
-          </p:nvPr>
-        </p:nvSpPr>
-        <p:spPr/>
-        <p:txBody>
-          <a:bodyPr/>
-          <a:lstStyle/>
-          <a:p>
-            <a:endParaRPr lang="LID4096"/>
-          </a:p>
-        </p:txBody>
-      </p:sp>
-    </p:spTree>
-    <p:extLst>
-      <p:ext uri="{BB962C8B-B14F-4D97-AF65-F5344CB8AC3E}">
-        <p14:creationId xmlns:p14="http://schemas.microsoft.com/office/powerpoint/2010/main" val="2960483433"/>
       </p:ext>
     </p:extLst>
   </p:cSld>
